--- a/docs/netwatch-intro.pptx
+++ b/docs/netwatch-intro.pptx
@@ -4462,7 +4462,7 @@
                 <a:ea typeface="Microsoft YaHei" pitchFamily="34" charset="-122"/>
                 <a:cs typeface="Microsoft YaHei" pitchFamily="34" charset="-120"/>
               </a:rPr>
-              <a:t>新目的地首传、超阈值大流量、归因失败外传,三条规则自动告警</a:t>
+              <a:t>新目的地首传、超阈值大流量、归因失败外传、心跳式小包,四条规则自动告警</a:t>
             </a:r>
             <a:endParaRPr lang="en-US" sz="1450" dirty="0"/>
           </a:p>
@@ -5836,7 +5836,7 @@
       </p:sp>
       <p:pic>
         <p:nvPicPr>
-          <p:cNvPr id="13" name="Image 0" descr="/tmp/vidbuild/frames/live-crop.png">    </p:cNvPr>
+          <p:cNvPr id="13" name="Image 0" descr="/home/ytadpole/code/netwatch/media/ppt/assets/live-crop.png">    </p:cNvPr>
           <p:cNvPicPr>
             <a:picLocks noChangeAspect="1"/>
           </p:cNvPicPr>
@@ -8757,7 +8757,7 @@
                 <a:ea typeface="Microsoft YaHei" pitchFamily="34" charset="-122"/>
                 <a:cs typeface="Microsoft YaHei" pitchFamily="34" charset="-120"/>
               </a:rPr>
-              <a:t>三条规则,盯住“偷偷传”</a:t>
+              <a:t>四条规则,盯住“偷偷传”</a:t>
             </a:r>
             <a:endParaRPr lang="en-US" sz="3200" dirty="0"/>
           </a:p>
@@ -9341,6 +9341,144 @@
                   </a:tcPr>
                 </a:tc>
               </a:tr>
+              <a:tr h="566928">
+                <a:tc>
+                  <a:txBody>
+                    <a:bodyPr/>
+                    <a:lstStyle/>
+                    <a:p>
+                      <a:pPr indent="0" marL="0">
+                        <a:buNone/>
+                      </a:pPr>
+                      <a:r>
+                        <a:rPr lang="en-US" sz="1250" dirty="0">
+                          <a:solidFill>
+                            <a:srgbClr val="F5B04C"/>
+                          </a:solidFill>
+                          <a:latin typeface="Consolas" pitchFamily="34" charset="0"/>
+                          <a:ea typeface="Consolas" pitchFamily="34" charset="-122"/>
+                          <a:cs typeface="Consolas" pitchFamily="34" charset="-120"/>
+                        </a:rPr>
+                        <a:t>beacon</a:t>
+                      </a:r>
+                      <a:endParaRPr lang="en-US" sz="1250" dirty="0">
+                        <a:latin typeface="Consolas" charset="0"/>
+                        <a:ea typeface="Consolas" charset="0"/>
+                        <a:cs typeface="Consolas" charset="0"/>
+                      </a:endParaRPr>
+                    </a:p>
+                  </a:txBody>
+                  <a:tcPr marL="73152" marR="73152" marT="73152" marB="73152" anchor="ctr">
+                    <a:lnL w="12700" cap="flat" cmpd="sng" algn="ctr">
+                      <a:solidFill>
+                        <a:srgbClr val="232C3F"/>
+                      </a:solidFill>
+                      <a:prstDash val="solid"/>
+                      <a:round/>
+                      <a:headEnd type="none" w="med" len="med"/>
+                      <a:tailEnd type="none" w="med" len="med"/>
+                    </a:lnL>
+                    <a:lnR w="12700" cap="flat" cmpd="sng" algn="ctr">
+                      <a:solidFill>
+                        <a:srgbClr val="232C3F"/>
+                      </a:solidFill>
+                      <a:prstDash val="solid"/>
+                      <a:round/>
+                      <a:headEnd type="none" w="med" len="med"/>
+                      <a:tailEnd type="none" w="med" len="med"/>
+                    </a:lnR>
+                    <a:lnT w="12700" cap="flat" cmpd="sng" algn="ctr">
+                      <a:solidFill>
+                        <a:srgbClr val="232C3F"/>
+                      </a:solidFill>
+                      <a:prstDash val="solid"/>
+                      <a:round/>
+                      <a:headEnd type="none" w="med" len="med"/>
+                      <a:tailEnd type="none" w="med" len="med"/>
+                    </a:lnT>
+                    <a:lnB w="12700" cap="flat" cmpd="sng" algn="ctr">
+                      <a:solidFill>
+                        <a:srgbClr val="232C3F"/>
+                      </a:solidFill>
+                      <a:prstDash val="solid"/>
+                      <a:round/>
+                      <a:headEnd type="none" w="med" len="med"/>
+                      <a:tailEnd type="none" w="med" len="med"/>
+                    </a:lnB>
+                    <a:solidFill>
+                      <a:srgbClr val="141A26"/>
+                    </a:solidFill>
+                  </a:tcPr>
+                </a:tc>
+                <a:tc>
+                  <a:txBody>
+                    <a:bodyPr/>
+                    <a:lstStyle/>
+                    <a:p>
+                      <a:pPr indent="0" marL="0">
+                        <a:buNone/>
+                      </a:pPr>
+                      <a:r>
+                        <a:rPr lang="en-US" sz="1300" dirty="0">
+                          <a:solidFill>
+                            <a:srgbClr val="E8EAF0"/>
+                          </a:solidFill>
+                          <a:latin typeface="Microsoft YaHei" pitchFamily="34" charset="0"/>
+                          <a:ea typeface="Microsoft YaHei" pitchFamily="34" charset="-122"/>
+                          <a:cs typeface="Microsoft YaHei" pitchFamily="34" charset="-120"/>
+                        </a:rPr>
+                        <a:t>心跳式小包外联:10min 窗口 ≥ 8 次、均值 ≤ 16KB/次、间隔抖动 ≤ 40%、持续 ≥ 5min</a:t>
+                      </a:r>
+                      <a:endParaRPr lang="en-US" sz="1300" dirty="0">
+                        <a:latin typeface="Microsoft YaHei" charset="0"/>
+                        <a:ea typeface="Microsoft YaHei" charset="0"/>
+                        <a:cs typeface="Microsoft YaHei" charset="0"/>
+                      </a:endParaRPr>
+                    </a:p>
+                  </a:txBody>
+                  <a:tcPr marL="73152" marR="73152" marT="73152" marB="73152" anchor="ctr">
+                    <a:lnL w="12700" cap="flat" cmpd="sng" algn="ctr">
+                      <a:solidFill>
+                        <a:srgbClr val="232C3F"/>
+                      </a:solidFill>
+                      <a:prstDash val="solid"/>
+                      <a:round/>
+                      <a:headEnd type="none" w="med" len="med"/>
+                      <a:tailEnd type="none" w="med" len="med"/>
+                    </a:lnL>
+                    <a:lnR w="12700" cap="flat" cmpd="sng" algn="ctr">
+                      <a:solidFill>
+                        <a:srgbClr val="232C3F"/>
+                      </a:solidFill>
+                      <a:prstDash val="solid"/>
+                      <a:round/>
+                      <a:headEnd type="none" w="med" len="med"/>
+                      <a:tailEnd type="none" w="med" len="med"/>
+                    </a:lnR>
+                    <a:lnT w="12700" cap="flat" cmpd="sng" algn="ctr">
+                      <a:solidFill>
+                        <a:srgbClr val="232C3F"/>
+                      </a:solidFill>
+                      <a:prstDash val="solid"/>
+                      <a:round/>
+                      <a:headEnd type="none" w="med" len="med"/>
+                      <a:tailEnd type="none" w="med" len="med"/>
+                    </a:lnT>
+                    <a:lnB w="12700" cap="flat" cmpd="sng" algn="ctr">
+                      <a:solidFill>
+                        <a:srgbClr val="232C3F"/>
+                      </a:solidFill>
+                      <a:prstDash val="solid"/>
+                      <a:round/>
+                      <a:headEnd type="none" w="med" len="med"/>
+                      <a:tailEnd type="none" w="med" len="med"/>
+                    </a:lnB>
+                    <a:solidFill>
+                      <a:srgbClr val="141A26"/>
+                    </a:solidFill>
+                  </a:tcPr>
+                </a:tc>
+              </a:tr>
             </a:tbl>
           </a:graphicData>
         </a:graphic>
@@ -9453,7 +9591,7 @@
       </p:sp>
       <p:pic>
         <p:nvPicPr>
-          <p:cNvPr id="10" name="Image 0" descr="/tmp/vidbuild/frames/alert/f0002.png">    </p:cNvPr>
+          <p:cNvPr id="10" name="Image 0" descr="/home/ytadpole/code/netwatch/media/ppt/assets/alert-f0002.png">    </p:cNvPr>
           <p:cNvPicPr>
             <a:picLocks noChangeAspect="1"/>
           </p:cNvPicPr>
